--- a/assets/pptx/catalog-612.pptx
+++ b/assets/pptx/catalog-612.pptx
@@ -3268,7 +3268,7 @@
                 <a:ea typeface="Ebrima"/>
                 <a:cs typeface="Ebrima"/>
               </a:rPr>
-              <a:t>አልነበረም ደግሞ አይኖርም (2x)</a:t>
+              <a:t>አልነበረም ደግሞ አይኖርም 2x</a:t>
             </a:r>
           </a:p>
         </p:txBody>
@@ -3389,7 +3389,7 @@
                 <a:ea typeface="Ebrima"/>
                 <a:cs typeface="Ebrima"/>
               </a:rPr>
-              <a:t>አልነበረም ደግሞ አይኖርም (2x)</a:t>
+              <a:t>አልነበረም ደግሞ አይኖርም 2x</a:t>
             </a:r>
           </a:p>
         </p:txBody>
@@ -3510,7 +3510,7 @@
                 <a:ea typeface="Ebrima"/>
                 <a:cs typeface="Ebrima"/>
               </a:rPr>
-              <a:t>ማርኮ አስቀርቶናል ኑሮዋችን የአንተ ነው (2x)</a:t>
+              <a:t>ማርኮ አስቀርቶናል ኑሮዋችን የአንተ ነው 2x</a:t>
             </a:r>
           </a:p>
         </p:txBody>
@@ -3631,7 +3631,7 @@
                 <a:ea typeface="Ebrima"/>
                 <a:cs typeface="Ebrima"/>
               </a:rPr>
-              <a:t>አልነበረም ደግሞ አይኖርም (2x)</a:t>
+              <a:t>አልነበረም ደግሞ አይኖርም 2x</a:t>
             </a:r>
           </a:p>
         </p:txBody>
@@ -3752,7 +3752,7 @@
                 <a:ea typeface="Ebrima"/>
                 <a:cs typeface="Ebrima"/>
               </a:rPr>
-              <a:t>ያመሰግኑሃል ክበር ጌታ ብለው (2x)</a:t>
+              <a:t>ያመሰግኑሃል ክበር ጌታ ብለው 2x</a:t>
             </a:r>
           </a:p>
         </p:txBody>
@@ -3873,7 +3873,7 @@
                 <a:ea typeface="Ebrima"/>
                 <a:cs typeface="Ebrima"/>
               </a:rPr>
-              <a:t>አልነበረም ደግሞ አይኖርም (2x)</a:t>
+              <a:t>አልነበረም ደግሞ አይኖርም 2x</a:t>
             </a:r>
           </a:p>
         </p:txBody>
@@ -3994,7 +3994,7 @@
                 <a:ea typeface="Ebrima"/>
                 <a:cs typeface="Ebrima"/>
               </a:rPr>
-              <a:t>መድኃኒታችን ሆይ ክብራችን ከአንተ ነው (2x)</a:t>
+              <a:t>መድኃኒታችን ሆይ ክብራችን ከአንተ ነው 2x</a:t>
             </a:r>
           </a:p>
         </p:txBody>
@@ -4115,7 +4115,7 @@
                 <a:ea typeface="Ebrima"/>
                 <a:cs typeface="Ebrima"/>
               </a:rPr>
-              <a:t>አልነበረም ደግሞ አይኖርም (2x)</a:t>
+              <a:t>አልነበረም ደግሞ አይኖርም 2x</a:t>
             </a:r>
           </a:p>
         </p:txBody>
@@ -4236,7 +4236,7 @@
                 <a:ea typeface="Ebrima"/>
                 <a:cs typeface="Ebrima"/>
               </a:rPr>
-              <a:t>ልዑል ሆይ ለሥምህ እንዘምራለን (2x)</a:t>
+              <a:t>ልዑል ሆይ ለሥምህ እንዘምራለን 2x</a:t>
             </a:r>
           </a:p>
         </p:txBody>
@@ -4357,7 +4357,7 @@
                 <a:ea typeface="Ebrima"/>
                 <a:cs typeface="Ebrima"/>
               </a:rPr>
-              <a:t>አልነበረም ደግሞ አይኖርም (4x)</a:t>
+              <a:t>አልነበረም ደግሞ አይኖርም 4x</a:t>
             </a:r>
           </a:p>
         </p:txBody>
